--- a/Day27-Agentic-AI-Agentic-RAG-and-Memory/Day27_Deck_Agentic_AI_Agentic_RAG_and_Memory.pptx
+++ b/Day27-Agentic-AI-Agentic-RAG-and-Memory/Day27_Deck_Agentic_AI_Agentic_RAG_and_Memory.pptx
@@ -6366,13 +6366,13 @@
           <a:noFill/>
         </p:spPr>
         <p:txBody>
-          <a:bodyPr wrap="square" lIns="0" rIns="0" tIns="0" bIns="0" anchor="t">
-            <a:spAutoFit/>
-          </a:bodyPr>
-          <a:lstStyle/>
-          <a:p>
-            <a:r>
-              <a:rPr sz="1040" b="0" i="0">
+          <a:bodyPr wrap="none" lIns="0" rIns="0" tIns="0" bIns="0" anchor="t">
+            <a:spAutoFit/>
+          </a:bodyPr>
+          <a:lstStyle/>
+          <a:p>
+            <a:r>
+              <a:rPr sz="915" b="0" i="0">
                 <a:solidFill>
                   <a:srgbClr val="EAF7F5"/>
                 </a:solidFill>
@@ -6383,7 +6383,7 @@
           </a:p>
           <a:p>
             <a:r>
-              <a:rPr sz="1040" b="0" i="0">
+              <a:rPr sz="915" b="0" i="0">
                 <a:solidFill>
                   <a:srgbClr val="EAF7F5"/>
                 </a:solidFill>
@@ -6394,7 +6394,7 @@
           </a:p>
           <a:p>
             <a:r>
-              <a:rPr sz="1040" b="0" i="0">
+              <a:rPr sz="915" b="0" i="0">
                 <a:solidFill>
                   <a:srgbClr val="EAF7F5"/>
                 </a:solidFill>
@@ -6405,7 +6405,7 @@
           </a:p>
           <a:p>
             <a:r>
-              <a:rPr sz="1040" b="0" i="0">
+              <a:rPr sz="915" b="0" i="0">
                 <a:solidFill>
                   <a:srgbClr val="EAF7F5"/>
                 </a:solidFill>
@@ -6416,7 +6416,7 @@
           </a:p>
           <a:p>
             <a:r>
-              <a:rPr sz="1040" b="0" i="0">
+              <a:rPr sz="915" b="0" i="0">
                 <a:solidFill>
                   <a:srgbClr val="EAF7F5"/>
                 </a:solidFill>
@@ -6427,7 +6427,7 @@
           </a:p>
           <a:p>
             <a:r>
-              <a:rPr sz="1040" b="0" i="0">
+              <a:rPr sz="915" b="0" i="0">
                 <a:solidFill>
                   <a:srgbClr val="EAF7F5"/>
                 </a:solidFill>
@@ -6438,7 +6438,7 @@
           </a:p>
           <a:p>
             <a:r>
-              <a:rPr sz="1040" b="0" i="0">
+              <a:rPr sz="915" b="0" i="0">
                 <a:solidFill>
                   <a:srgbClr val="EAF7F5"/>
                 </a:solidFill>
@@ -6449,7 +6449,7 @@
           </a:p>
           <a:p>
             <a:r>
-              <a:rPr sz="1040" b="0" i="0">
+              <a:rPr sz="915" b="0" i="0">
                 <a:solidFill>
                   <a:srgbClr val="EAF7F5"/>
                 </a:solidFill>
@@ -6460,7 +6460,7 @@
           </a:p>
           <a:p>
             <a:r>
-              <a:rPr sz="1040" b="0" i="0">
+              <a:rPr sz="915" b="0" i="0">
                 <a:solidFill>
                   <a:srgbClr val="EAF7F5"/>
                 </a:solidFill>
@@ -6471,7 +6471,7 @@
           </a:p>
           <a:p>
             <a:r>
-              <a:rPr sz="1040" b="0" i="0">
+              <a:rPr sz="915" b="0" i="0">
                 <a:solidFill>
                   <a:srgbClr val="EAF7F5"/>
                 </a:solidFill>
@@ -13162,13 +13162,13 @@
           <a:noFill/>
         </p:spPr>
         <p:txBody>
-          <a:bodyPr wrap="square" lIns="0" rIns="0" tIns="0" bIns="0" anchor="t">
-            <a:spAutoFit/>
-          </a:bodyPr>
-          <a:lstStyle/>
-          <a:p>
-            <a:r>
-              <a:rPr sz="1062" b="0" i="0">
+          <a:bodyPr wrap="none" lIns="0" rIns="0" tIns="0" bIns="0" anchor="t">
+            <a:spAutoFit/>
+          </a:bodyPr>
+          <a:lstStyle/>
+          <a:p>
+            <a:r>
+              <a:rPr sz="935" b="0" i="0">
                 <a:solidFill>
                   <a:srgbClr val="EAF7F5"/>
                 </a:solidFill>
@@ -13179,7 +13179,7 @@
           </a:p>
           <a:p>
             <a:r>
-              <a:rPr sz="1062" b="0" i="0">
+              <a:rPr sz="935" b="0" i="0">
                 <a:solidFill>
                   <a:srgbClr val="EAF7F5"/>
                 </a:solidFill>
@@ -13190,7 +13190,7 @@
           </a:p>
           <a:p>
             <a:r>
-              <a:rPr sz="1062" b="0" i="0">
+              <a:rPr sz="935" b="0" i="0">
                 <a:solidFill>
                   <a:srgbClr val="EAF7F5"/>
                 </a:solidFill>
@@ -13201,7 +13201,7 @@
           </a:p>
           <a:p>
             <a:r>
-              <a:rPr sz="1062" b="0" i="0">
+              <a:rPr sz="935" b="0" i="0">
                 <a:solidFill>
                   <a:srgbClr val="EAF7F5"/>
                 </a:solidFill>
@@ -13212,7 +13212,7 @@
           </a:p>
           <a:p>
             <a:r>
-              <a:rPr sz="1062" b="0" i="0">
+              <a:rPr sz="935" b="0" i="0">
                 <a:solidFill>
                   <a:srgbClr val="EAF7F5"/>
                 </a:solidFill>
@@ -13223,7 +13223,7 @@
           </a:p>
           <a:p>
             <a:r>
-              <a:rPr sz="1062" b="0" i="0">
+              <a:rPr sz="935" b="0" i="0">
                 <a:solidFill>
                   <a:srgbClr val="EAF7F5"/>
                 </a:solidFill>
@@ -13234,7 +13234,7 @@
           </a:p>
           <a:p>
             <a:r>
-              <a:rPr sz="1062" b="0" i="0">
+              <a:rPr sz="935" b="0" i="0">
                 <a:solidFill>
                   <a:srgbClr val="EAF7F5"/>
                 </a:solidFill>
@@ -13245,7 +13245,7 @@
           </a:p>
           <a:p>
             <a:r>
-              <a:rPr sz="1062" b="0" i="0">
+              <a:rPr sz="935" b="0" i="0">
                 <a:solidFill>
                   <a:srgbClr val="EAF7F5"/>
                 </a:solidFill>
@@ -13256,7 +13256,7 @@
           </a:p>
           <a:p>
             <a:r>
-              <a:rPr sz="1062" b="0" i="0">
+              <a:rPr sz="935" b="0" i="0">
                 <a:solidFill>
                   <a:srgbClr val="EAF7F5"/>
                 </a:solidFill>
@@ -13267,7 +13267,7 @@
           </a:p>
           <a:p>
             <a:r>
-              <a:rPr sz="1062" b="0" i="0">
+              <a:rPr sz="935" b="0" i="0">
                 <a:solidFill>
                   <a:srgbClr val="EAF7F5"/>
                 </a:solidFill>
@@ -13278,7 +13278,7 @@
           </a:p>
           <a:p>
             <a:r>
-              <a:rPr sz="1062" b="0" i="0">
+              <a:rPr sz="935" b="0" i="0">
                 <a:solidFill>
                   <a:srgbClr val="EAF7F5"/>
                 </a:solidFill>
@@ -23225,13 +23225,13 @@
           <a:noFill/>
         </p:spPr>
         <p:txBody>
-          <a:bodyPr wrap="square" lIns="0" rIns="0" tIns="0" bIns="0" anchor="t">
-            <a:spAutoFit/>
-          </a:bodyPr>
-          <a:lstStyle/>
-          <a:p>
-            <a:r>
-              <a:rPr sz="1040" b="0" i="0">
+          <a:bodyPr wrap="none" lIns="0" rIns="0" tIns="0" bIns="0" anchor="t">
+            <a:spAutoFit/>
+          </a:bodyPr>
+          <a:lstStyle/>
+          <a:p>
+            <a:r>
+              <a:rPr sz="915" b="0" i="0">
                 <a:solidFill>
                   <a:srgbClr val="EAF7F5"/>
                 </a:solidFill>
@@ -23242,7 +23242,7 @@
           </a:p>
           <a:p>
             <a:r>
-              <a:rPr sz="1040" b="0" i="0">
+              <a:rPr sz="915" b="0" i="0">
                 <a:solidFill>
                   <a:srgbClr val="EAF7F5"/>
                 </a:solidFill>
@@ -23253,7 +23253,7 @@
           </a:p>
           <a:p>
             <a:r>
-              <a:rPr sz="1040" b="0" i="0">
+              <a:rPr sz="915" b="0" i="0">
                 <a:solidFill>
                   <a:srgbClr val="EAF7F5"/>
                 </a:solidFill>
@@ -23264,7 +23264,7 @@
           </a:p>
           <a:p>
             <a:r>
-              <a:rPr sz="1040" b="0" i="0">
+              <a:rPr sz="915" b="0" i="0">
                 <a:solidFill>
                   <a:srgbClr val="EAF7F5"/>
                 </a:solidFill>
@@ -23275,7 +23275,7 @@
           </a:p>
           <a:p>
             <a:r>
-              <a:rPr sz="1040" b="0" i="0">
+              <a:rPr sz="915" b="0" i="0">
                 <a:solidFill>
                   <a:srgbClr val="EAF7F5"/>
                 </a:solidFill>
@@ -23286,7 +23286,7 @@
           </a:p>
           <a:p>
             <a:r>
-              <a:rPr sz="1040" b="0" i="0">
+              <a:rPr sz="915" b="0" i="0">
                 <a:solidFill>
                   <a:srgbClr val="EAF7F5"/>
                 </a:solidFill>
@@ -23297,7 +23297,7 @@
           </a:p>
           <a:p>
             <a:r>
-              <a:rPr sz="1040" b="0" i="0">
+              <a:rPr sz="915" b="0" i="0">
                 <a:solidFill>
                   <a:srgbClr val="EAF7F5"/>
                 </a:solidFill>
@@ -23308,7 +23308,7 @@
           </a:p>
           <a:p>
             <a:r>
-              <a:rPr sz="1040" b="0" i="0">
+              <a:rPr sz="915" b="0" i="0">
                 <a:solidFill>
                   <a:srgbClr val="EAF7F5"/>
                 </a:solidFill>
@@ -23319,7 +23319,7 @@
           </a:p>
           <a:p>
             <a:r>
-              <a:rPr sz="1040" b="0" i="0">
+              <a:rPr sz="915" b="0" i="0">
                 <a:solidFill>
                   <a:srgbClr val="EAF7F5"/>
                 </a:solidFill>
@@ -23330,7 +23330,7 @@
           </a:p>
           <a:p>
             <a:r>
-              <a:rPr sz="1040" b="0" i="0">
+              <a:rPr sz="915" b="0" i="0">
                 <a:solidFill>
                   <a:srgbClr val="EAF7F5"/>
                 </a:solidFill>
@@ -23341,7 +23341,7 @@
           </a:p>
           <a:p>
             <a:r>
-              <a:rPr sz="1040" b="0" i="0">
+              <a:rPr sz="915" b="0" i="0">
                 <a:solidFill>
                   <a:srgbClr val="EAF7F5"/>
                 </a:solidFill>
@@ -23352,7 +23352,7 @@
           </a:p>
           <a:p>
             <a:r>
-              <a:rPr sz="1040" b="0" i="0">
+              <a:rPr sz="915" b="0" i="0">
                 <a:solidFill>
                   <a:srgbClr val="EAF7F5"/>
                 </a:solidFill>
@@ -23363,7 +23363,7 @@
           </a:p>
           <a:p>
             <a:r>
-              <a:rPr sz="1040" b="0" i="0">
+              <a:rPr sz="915" b="0" i="0">
                 <a:solidFill>
                   <a:srgbClr val="EAF7F5"/>
                 </a:solidFill>
@@ -23374,7 +23374,7 @@
           </a:p>
           <a:p>
             <a:r>
-              <a:rPr sz="1040" b="0" i="0">
+              <a:rPr sz="915" b="0" i="0">
                 <a:solidFill>
                   <a:srgbClr val="EAF7F5"/>
                 </a:solidFill>
@@ -23385,7 +23385,7 @@
           </a:p>
           <a:p>
             <a:r>
-              <a:rPr sz="1040" b="0" i="0">
+              <a:rPr sz="915" b="0" i="0">
                 <a:solidFill>
                   <a:srgbClr val="EAF7F5"/>
                 </a:solidFill>
